--- a/generated/Tier 1 Broker Scorecards/Lion Insurance Services_Broker_Scorecard.pptx
+++ b/generated/Tier 1 Broker Scorecards/Lion Insurance Services_Broker_Scorecard.pptx
@@ -3357,7 +3357,7 @@
                         <a:rPr sz="800">
                           <a:latin typeface="Segoe UI"/>
                         </a:rPr>
-                        <a:t>$345,901.49 / $817,506.23 / $477,446.93</a:t>
+                        <a:t>$345,901.49 / $819,815.55 / $479,756.25</a:t>
                       </a:r>
                     </a:p>
                   </a:txBody>
@@ -3394,7 +3394,7 @@
                         <a:rPr sz="900">
                           <a:latin typeface="Segoe UI"/>
                         </a:rPr>
-                        <a:t>Tier 1  |  4.89% / 15.00%</a:t>
+                        <a:t>Tier 1  |  4.44% / 15.00%</a:t>
                       </a:r>
                     </a:p>
                   </a:txBody>
@@ -3431,7 +3431,7 @@
                         <a:rPr sz="900">
                           <a:latin typeface="Segoe UI"/>
                         </a:rPr>
-                        <a:t>$484,262.09  (98.6% achieved)</a:t>
+                        <a:t>$484,262.09  (99.1% achieved)</a:t>
                       </a:r>
                     </a:p>
                   </a:txBody>
@@ -3653,7 +3653,7 @@
                         <a:rPr sz="900">
                           <a:latin typeface="Segoe UI"/>
                         </a:rPr>
-                        <a:t>Fleet Subs: 23  |  Binds: 0</a:t>
+                        <a:t>Fleet Subs: 23  |  Binds: 1</a:t>
                       </a:r>
                     </a:p>
                   </a:txBody>
@@ -3690,7 +3690,7 @@
                         <a:rPr sz="900">
                           <a:latin typeface="Segoe UI"/>
                         </a:rPr>
-                        <a:t>Fleet Bound Premium: $0.00</a:t>
+                        <a:t>Fleet Bound Premium: $167,442.79</a:t>
                       </a:r>
                     </a:p>
                   </a:txBody>
@@ -3727,7 +3727,7 @@
                         <a:rPr sz="900">
                           <a:latin typeface="Segoe UI"/>
                         </a:rPr>
-                        <a:t>Fleet Book %: 0.0%</a:t>
+                        <a:t>Fleet Book %: 34.9%</a:t>
                       </a:r>
                     </a:p>
                   </a:txBody>
@@ -3766,7 +3766,7 @@
                         <a:rPr sz="900">
                           <a:latin typeface="Segoe UI"/>
                         </a:rPr>
-                        <a:t>Non-Fleet Subs: 202  |  Binds: 11</a:t>
+                        <a:t>Non-Fleet Subs: 202  |  Binds: 9</a:t>
                       </a:r>
                     </a:p>
                   </a:txBody>
@@ -3803,7 +3803,7 @@
                         <a:rPr sz="900">
                           <a:latin typeface="Segoe UI"/>
                         </a:rPr>
-                        <a:t>Non-Fleet Bound Premium: $477,446.93</a:t>
+                        <a:t>Non-Fleet Bound Premium: $312,313.46</a:t>
                       </a:r>
                     </a:p>
                   </a:txBody>
@@ -3840,7 +3840,7 @@
                         <a:rPr sz="900">
                           <a:latin typeface="Segoe UI"/>
                         </a:rPr>
-                        <a:t>Non-Fleet Book %: 100.0%</a:t>
+                        <a:t>Non-Fleet Book %: 65.1%</a:t>
                       </a:r>
                     </a:p>
                   </a:txBody>
@@ -4428,7 +4428,7 @@
                           </a:solidFill>
                           <a:latin typeface="Segoe UI"/>
                         </a:rPr>
-                        <a:t>33</a:t>
+                        <a:t>36</a:t>
                       </a:r>
                     </a:p>
                   </a:txBody>
@@ -4620,11 +4620,11 @@
                       <a:r>
                         <a:rPr sz="800">
                           <a:solidFill>
-                            <a:srgbClr val="DC2626"/>
+                            <a:srgbClr val="059669"/>
                           </a:solidFill>
                           <a:latin typeface="Segoe UI"/>
                         </a:rPr>
-                        <a:t>11.9%</a:t>
+                        <a:t>13.4%</a:t>
                       </a:r>
                     </a:p>
                   </a:txBody>
@@ -4707,7 +4707,7 @@
                           </a:solidFill>
                           <a:latin typeface="Segoe UI"/>
                         </a:rPr>
-                        <a:t>9.1%</a:t>
+                        <a:t>8.3%</a:t>
                       </a:r>
                     </a:p>
                   </a:txBody>
@@ -4906,7 +4906,7 @@
                           </a:solidFill>
                           <a:latin typeface="Segoe UI"/>
                         </a:rPr>
-                        <a:t>8</a:t>
+                        <a:t>9</a:t>
                       </a:r>
                     </a:p>
                   </a:txBody>
@@ -5262,7 +5262,7 @@
                           </a:solidFill>
                           <a:latin typeface="Segoe UI"/>
                         </a:rPr>
-                        <a:t>$61.3K</a:t>
+                        <a:t>$63.6K</a:t>
                       </a:r>
                     </a:p>
                   </a:txBody>

--- a/generated/Tier 1 Broker Scorecards/Lion Insurance Services_Broker_Scorecard.pptx
+++ b/generated/Tier 1 Broker Scorecards/Lion Insurance Services_Broker_Scorecard.pptx
@@ -3394,7 +3394,7 @@
                         <a:rPr sz="900">
                           <a:latin typeface="Segoe UI"/>
                         </a:rPr>
-                        <a:t>Tier 1  |  4.44% / 15.00%</a:t>
+                        <a:t>Tier 1  |  5.63% / 15.00%</a:t>
                       </a:r>
                     </a:p>
                   </a:txBody>
@@ -3690,7 +3690,7 @@
                         <a:rPr sz="900">
                           <a:latin typeface="Segoe UI"/>
                         </a:rPr>
-                        <a:t>Fleet Bound Premium: $167,442.79</a:t>
+                        <a:t>Fleet Bound Premium: $120,205.74</a:t>
                       </a:r>
                     </a:p>
                   </a:txBody>
@@ -3727,7 +3727,7 @@
                         <a:rPr sz="900">
                           <a:latin typeface="Segoe UI"/>
                         </a:rPr>
-                        <a:t>Fleet Book %: 34.9%</a:t>
+                        <a:t>Fleet Book %: 25.1%</a:t>
                       </a:r>
                     </a:p>
                   </a:txBody>
@@ -3766,7 +3766,7 @@
                         <a:rPr sz="900">
                           <a:latin typeface="Segoe UI"/>
                         </a:rPr>
-                        <a:t>Non-Fleet Subs: 202  |  Binds: 9</a:t>
+                        <a:t>Non-Fleet Subs: 208  |  Binds: 12</a:t>
                       </a:r>
                     </a:p>
                   </a:txBody>
@@ -3803,7 +3803,7 @@
                         <a:rPr sz="900">
                           <a:latin typeface="Segoe UI"/>
                         </a:rPr>
-                        <a:t>Non-Fleet Bound Premium: $312,313.46</a:t>
+                        <a:t>Non-Fleet Bound Premium: $359,550.51</a:t>
                       </a:r>
                     </a:p>
                   </a:txBody>
@@ -3840,7 +3840,7 @@
                         <a:rPr sz="900">
                           <a:latin typeface="Segoe UI"/>
                         </a:rPr>
-                        <a:t>Non-Fleet Book %: 65.1%</a:t>
+                        <a:t>Non-Fleet Book %: 74.9%</a:t>
                       </a:r>
                     </a:p>
                   </a:txBody>
@@ -4428,7 +4428,7 @@
                           </a:solidFill>
                           <a:latin typeface="Segoe UI"/>
                         </a:rPr>
-                        <a:t>36</a:t>
+                        <a:t>42</a:t>
                       </a:r>
                     </a:p>
                   </a:txBody>
@@ -4620,11 +4620,11 @@
                       <a:r>
                         <a:rPr sz="800">
                           <a:solidFill>
-                            <a:srgbClr val="059669"/>
+                            <a:srgbClr val="DC2626"/>
                           </a:solidFill>
                           <a:latin typeface="Segoe UI"/>
                         </a:rPr>
-                        <a:t>13.4%</a:t>
+                        <a:t>11.9%</a:t>
                       </a:r>
                     </a:p>
                   </a:txBody>
@@ -4707,7 +4707,7 @@
                           </a:solidFill>
                           <a:latin typeface="Segoe UI"/>
                         </a:rPr>
-                        <a:t>8.3%</a:t>
+                        <a:t>7.1%</a:t>
                       </a:r>
                     </a:p>
                   </a:txBody>
@@ -4906,7 +4906,7 @@
                           </a:solidFill>
                           <a:latin typeface="Segoe UI"/>
                         </a:rPr>
-                        <a:t>9</a:t>
+                        <a:t>8</a:t>
                       </a:r>
                     </a:p>
                   </a:txBody>

--- a/generated/Tier 1 Broker Scorecards/Lion Insurance Services_Broker_Scorecard.pptx
+++ b/generated/Tier 1 Broker Scorecards/Lion Insurance Services_Broker_Scorecard.pptx
@@ -3394,7 +3394,7 @@
                         <a:rPr sz="900">
                           <a:latin typeface="Segoe UI"/>
                         </a:rPr>
-                        <a:t>Tier 1  |  5.63% / 15.00%</a:t>
+                        <a:t>Tier 1  |  4.26% / 15.00%</a:t>
                       </a:r>
                     </a:p>
                   </a:txBody>
@@ -3690,7 +3690,7 @@
                         <a:rPr sz="900">
                           <a:latin typeface="Segoe UI"/>
                         </a:rPr>
-                        <a:t>Fleet Bound Premium: $120,205.74</a:t>
+                        <a:t>Fleet Bound Premium: $162,424.33</a:t>
                       </a:r>
                     </a:p>
                   </a:txBody>
@@ -3727,7 +3727,7 @@
                         <a:rPr sz="900">
                           <a:latin typeface="Segoe UI"/>
                         </a:rPr>
-                        <a:t>Fleet Book %: 25.1%</a:t>
+                        <a:t>Fleet Book %: 33.9%</a:t>
                       </a:r>
                     </a:p>
                   </a:txBody>
@@ -3766,7 +3766,7 @@
                         <a:rPr sz="900">
                           <a:latin typeface="Segoe UI"/>
                         </a:rPr>
-                        <a:t>Non-Fleet Subs: 208  |  Binds: 12</a:t>
+                        <a:t>Non-Fleet Subs: 212  |  Binds: 9</a:t>
                       </a:r>
                     </a:p>
                   </a:txBody>
@@ -3803,7 +3803,7 @@
                         <a:rPr sz="900">
                           <a:latin typeface="Segoe UI"/>
                         </a:rPr>
-                        <a:t>Non-Fleet Bound Premium: $359,550.51</a:t>
+                        <a:t>Non-Fleet Bound Premium: $317,331.92</a:t>
                       </a:r>
                     </a:p>
                   </a:txBody>
@@ -3840,7 +3840,7 @@
                         <a:rPr sz="900">
                           <a:latin typeface="Segoe UI"/>
                         </a:rPr>
-                        <a:t>Non-Fleet Book %: 74.9%</a:t>
+                        <a:t>Non-Fleet Book %: 66.1%</a:t>
                       </a:r>
                     </a:p>
                   </a:txBody>
@@ -4428,7 +4428,7 @@
                           </a:solidFill>
                           <a:latin typeface="Segoe UI"/>
                         </a:rPr>
-                        <a:t>42</a:t>
+                        <a:t>46</a:t>
                       </a:r>
                     </a:p>
                   </a:txBody>
@@ -4707,7 +4707,7 @@
                           </a:solidFill>
                           <a:latin typeface="Segoe UI"/>
                         </a:rPr>
-                        <a:t>7.1%</a:t>
+                        <a:t>6.5%</a:t>
                       </a:r>
                     </a:p>
                   </a:txBody>

--- a/generated/Tier 1 Broker Scorecards/Lion Insurance Services_Broker_Scorecard.pptx
+++ b/generated/Tier 1 Broker Scorecards/Lion Insurance Services_Broker_Scorecard.pptx
@@ -3394,7 +3394,7 @@
                         <a:rPr sz="900">
                           <a:latin typeface="Segoe UI"/>
                         </a:rPr>
-                        <a:t>Tier 1  |  4.26% / 15.00%</a:t>
+                        <a:t>Tier 1  |  4.64% / 15.00%</a:t>
                       </a:r>
                     </a:p>
                   </a:txBody>
@@ -3690,7 +3690,7 @@
                         <a:rPr sz="900">
                           <a:latin typeface="Segoe UI"/>
                         </a:rPr>
-                        <a:t>Fleet Bound Premium: $162,424.33</a:t>
+                        <a:t>Fleet Bound Premium: $140,145.58</a:t>
                       </a:r>
                     </a:p>
                   </a:txBody>
@@ -3727,7 +3727,7 @@
                         <a:rPr sz="900">
                           <a:latin typeface="Segoe UI"/>
                         </a:rPr>
-                        <a:t>Fleet Book %: 33.9%</a:t>
+                        <a:t>Fleet Book %: 29.2%</a:t>
                       </a:r>
                     </a:p>
                   </a:txBody>
@@ -3766,7 +3766,7 @@
                         <a:rPr sz="900">
                           <a:latin typeface="Segoe UI"/>
                         </a:rPr>
-                        <a:t>Non-Fleet Subs: 212  |  Binds: 9</a:t>
+                        <a:t>Non-Fleet Subs: 214  |  Binds: 10</a:t>
                       </a:r>
                     </a:p>
                   </a:txBody>
@@ -3803,7 +3803,7 @@
                         <a:rPr sz="900">
                           <a:latin typeface="Segoe UI"/>
                         </a:rPr>
-                        <a:t>Non-Fleet Bound Premium: $317,331.92</a:t>
+                        <a:t>Non-Fleet Bound Premium: $339,610.67</a:t>
                       </a:r>
                     </a:p>
                   </a:txBody>
@@ -3840,7 +3840,7 @@
                         <a:rPr sz="900">
                           <a:latin typeface="Segoe UI"/>
                         </a:rPr>
-                        <a:t>Non-Fleet Book %: 66.1%</a:t>
+                        <a:t>Non-Fleet Book %: 70.8%</a:t>
                       </a:r>
                     </a:p>
                   </a:txBody>
@@ -4428,7 +4428,7 @@
                           </a:solidFill>
                           <a:latin typeface="Segoe UI"/>
                         </a:rPr>
-                        <a:t>46</a:t>
+                        <a:t>48</a:t>
                       </a:r>
                     </a:p>
                   </a:txBody>
@@ -4707,7 +4707,7 @@
                           </a:solidFill>
                           <a:latin typeface="Segoe UI"/>
                         </a:rPr>
-                        <a:t>6.5%</a:t>
+                        <a:t>6.2%</a:t>
                       </a:r>
                     </a:p>
                   </a:txBody>

--- a/generated/Tier 1 Broker Scorecards/Lion Insurance Services_Broker_Scorecard.pptx
+++ b/generated/Tier 1 Broker Scorecards/Lion Insurance Services_Broker_Scorecard.pptx
@@ -3394,7 +3394,7 @@
                         <a:rPr sz="900">
                           <a:latin typeface="Segoe UI"/>
                         </a:rPr>
-                        <a:t>Tier 1  |  4.64% / 15.00%</a:t>
+                        <a:t>Tier 1  |  4.20% / 15.00%</a:t>
                       </a:r>
                     </a:p>
                   </a:txBody>
@@ -3653,7 +3653,7 @@
                         <a:rPr sz="900">
                           <a:latin typeface="Segoe UI"/>
                         </a:rPr>
-                        <a:t>Fleet Subs: 23  |  Binds: 1</a:t>
+                        <a:t>Fleet Subs: 24  |  Binds: 1</a:t>
                       </a:r>
                     </a:p>
                   </a:txBody>
@@ -3690,7 +3690,7 @@
                         <a:rPr sz="900">
                           <a:latin typeface="Segoe UI"/>
                         </a:rPr>
-                        <a:t>Fleet Bound Premium: $140,145.58</a:t>
+                        <a:t>Fleet Bound Premium: $152,205.98</a:t>
                       </a:r>
                     </a:p>
                   </a:txBody>
@@ -3727,7 +3727,7 @@
                         <a:rPr sz="900">
                           <a:latin typeface="Segoe UI"/>
                         </a:rPr>
-                        <a:t>Fleet Book %: 29.2%</a:t>
+                        <a:t>Fleet Book %: 31.7%</a:t>
                       </a:r>
                     </a:p>
                   </a:txBody>
@@ -3766,7 +3766,7 @@
                         <a:rPr sz="900">
                           <a:latin typeface="Segoe UI"/>
                         </a:rPr>
-                        <a:t>Non-Fleet Subs: 214  |  Binds: 10</a:t>
+                        <a:t>Non-Fleet Subs: 214  |  Binds: 9</a:t>
                       </a:r>
                     </a:p>
                   </a:txBody>
@@ -3803,7 +3803,7 @@
                         <a:rPr sz="900">
                           <a:latin typeface="Segoe UI"/>
                         </a:rPr>
-                        <a:t>Non-Fleet Bound Premium: $339,610.67</a:t>
+                        <a:t>Non-Fleet Bound Premium: $327,550.27</a:t>
                       </a:r>
                     </a:p>
                   </a:txBody>
@@ -3840,7 +3840,7 @@
                         <a:rPr sz="900">
                           <a:latin typeface="Segoe UI"/>
                         </a:rPr>
-                        <a:t>Non-Fleet Book %: 70.8%</a:t>
+                        <a:t>Non-Fleet Book %: 68.3%</a:t>
                       </a:r>
                     </a:p>
                   </a:txBody>
@@ -4428,7 +4428,7 @@
                           </a:solidFill>
                           <a:latin typeface="Segoe UI"/>
                         </a:rPr>
-                        <a:t>48</a:t>
+                        <a:t>49</a:t>
                       </a:r>
                     </a:p>
                   </a:txBody>
@@ -4707,7 +4707,7 @@
                           </a:solidFill>
                           <a:latin typeface="Segoe UI"/>
                         </a:rPr>
-                        <a:t>6.2%</a:t>
+                        <a:t>6.1%</a:t>
                       </a:r>
                     </a:p>
                   </a:txBody>

--- a/generated/Tier 1 Broker Scorecards/Lion Insurance Services_Broker_Scorecard.pptx
+++ b/generated/Tier 1 Broker Scorecards/Lion Insurance Services_Broker_Scorecard.pptx
@@ -3394,7 +3394,7 @@
                         <a:rPr sz="900">
                           <a:latin typeface="Segoe UI"/>
                         </a:rPr>
-                        <a:t>Tier 1  |  4.20% / 15.00%</a:t>
+                        <a:t>Tier 1  |  4.18% / 15.00%</a:t>
                       </a:r>
                     </a:p>
                   </a:txBody>
@@ -3766,7 +3766,7 @@
                         <a:rPr sz="900">
                           <a:latin typeface="Segoe UI"/>
                         </a:rPr>
-                        <a:t>Non-Fleet Subs: 214  |  Binds: 9</a:t>
+                        <a:t>Non-Fleet Subs: 215  |  Binds: 9</a:t>
                       </a:r>
                     </a:p>
                   </a:txBody>
@@ -4428,7 +4428,7 @@
                           </a:solidFill>
                           <a:latin typeface="Segoe UI"/>
                         </a:rPr>
-                        <a:t>49</a:t>
+                        <a:t>50</a:t>
                       </a:r>
                     </a:p>
                   </a:txBody>
@@ -4707,7 +4707,7 @@
                           </a:solidFill>
                           <a:latin typeface="Segoe UI"/>
                         </a:rPr>
-                        <a:t>6.1%</a:t>
+                        <a:t>6.0%</a:t>
                       </a:r>
                     </a:p>
                   </a:txBody>

--- a/generated/Tier 1 Broker Scorecards/Lion Insurance Services_Broker_Scorecard.pptx
+++ b/generated/Tier 1 Broker Scorecards/Lion Insurance Services_Broker_Scorecard.pptx
@@ -3394,7 +3394,7 @@
                         <a:rPr sz="900">
                           <a:latin typeface="Segoe UI"/>
                         </a:rPr>
-                        <a:t>Tier 1  |  4.18% / 15.00%</a:t>
+                        <a:t>Tier 1  |  3.77% / 15.00%</a:t>
                       </a:r>
                     </a:p>
                   </a:txBody>
@@ -3690,7 +3690,7 @@
                         <a:rPr sz="900">
                           <a:latin typeface="Segoe UI"/>
                         </a:rPr>
-                        <a:t>Fleet Bound Premium: $152,205.98</a:t>
+                        <a:t>Fleet Bound Premium: $184,952.44</a:t>
                       </a:r>
                     </a:p>
                   </a:txBody>
@@ -3727,7 +3727,7 @@
                         <a:rPr sz="900">
                           <a:latin typeface="Segoe UI"/>
                         </a:rPr>
-                        <a:t>Fleet Book %: 31.7%</a:t>
+                        <a:t>Fleet Book %: 38.6%</a:t>
                       </a:r>
                     </a:p>
                   </a:txBody>
@@ -3766,7 +3766,7 @@
                         <a:rPr sz="900">
                           <a:latin typeface="Segoe UI"/>
                         </a:rPr>
-                        <a:t>Non-Fleet Subs: 215  |  Binds: 9</a:t>
+                        <a:t>Non-Fleet Subs: 215  |  Binds: 8</a:t>
                       </a:r>
                     </a:p>
                   </a:txBody>
@@ -3803,7 +3803,7 @@
                         <a:rPr sz="900">
                           <a:latin typeface="Segoe UI"/>
                         </a:rPr>
-                        <a:t>Non-Fleet Bound Premium: $327,550.27</a:t>
+                        <a:t>Non-Fleet Bound Premium: $294,803.81</a:t>
                       </a:r>
                     </a:p>
                   </a:txBody>
@@ -3840,7 +3840,7 @@
                         <a:rPr sz="900">
                           <a:latin typeface="Segoe UI"/>
                         </a:rPr>
-                        <a:t>Non-Fleet Book %: 68.3%</a:t>
+                        <a:t>Non-Fleet Book %: 61.4%</a:t>
                       </a:r>
                     </a:p>
                   </a:txBody>
@@ -4620,11 +4620,11 @@
                       <a:r>
                         <a:rPr sz="800">
                           <a:solidFill>
-                            <a:srgbClr val="DC2626"/>
+                            <a:srgbClr val="059669"/>
                           </a:solidFill>
                           <a:latin typeface="Segoe UI"/>
                         </a:rPr>
-                        <a:t>11.9%</a:t>
+                        <a:t>13.4%</a:t>
                       </a:r>
                     </a:p>
                   </a:txBody>
@@ -4906,7 +4906,7 @@
                           </a:solidFill>
                           <a:latin typeface="Segoe UI"/>
                         </a:rPr>
-                        <a:t>8</a:t>
+                        <a:t>9</a:t>
                       </a:r>
                     </a:p>
                   </a:txBody>

--- a/generated/Tier 1 Broker Scorecards/Lion Insurance Services_Broker_Scorecard.pptx
+++ b/generated/Tier 1 Broker Scorecards/Lion Insurance Services_Broker_Scorecard.pptx
@@ -3394,7 +3394,7 @@
                         <a:rPr sz="900">
                           <a:latin typeface="Segoe UI"/>
                         </a:rPr>
-                        <a:t>Tier 1  |  3.77% / 15.00%</a:t>
+                        <a:t>Tier 1  |  4.60% / 15.00%</a:t>
                       </a:r>
                     </a:p>
                   </a:txBody>
@@ -3690,7 +3690,7 @@
                         <a:rPr sz="900">
                           <a:latin typeface="Segoe UI"/>
                         </a:rPr>
-                        <a:t>Fleet Bound Premium: $184,952.44</a:t>
+                        <a:t>Fleet Bound Premium: $155,723.48</a:t>
                       </a:r>
                     </a:p>
                   </a:txBody>
@@ -3727,7 +3727,7 @@
                         <a:rPr sz="900">
                           <a:latin typeface="Segoe UI"/>
                         </a:rPr>
-                        <a:t>Fleet Book %: 38.6%</a:t>
+                        <a:t>Fleet Book %: 32.5%</a:t>
                       </a:r>
                     </a:p>
                   </a:txBody>
@@ -3766,7 +3766,7 @@
                         <a:rPr sz="900">
                           <a:latin typeface="Segoe UI"/>
                         </a:rPr>
-                        <a:t>Non-Fleet Subs: 215  |  Binds: 8</a:t>
+                        <a:t>Non-Fleet Subs: 215  |  Binds: 10</a:t>
                       </a:r>
                     </a:p>
                   </a:txBody>
@@ -3803,7 +3803,7 @@
                         <a:rPr sz="900">
                           <a:latin typeface="Segoe UI"/>
                         </a:rPr>
-                        <a:t>Non-Fleet Bound Premium: $294,803.81</a:t>
+                        <a:t>Non-Fleet Bound Premium: $324,032.77</a:t>
                       </a:r>
                     </a:p>
                   </a:txBody>
@@ -3840,7 +3840,7 @@
                         <a:rPr sz="900">
                           <a:latin typeface="Segoe UI"/>
                         </a:rPr>
-                        <a:t>Non-Fleet Book %: 61.4%</a:t>
+                        <a:t>Non-Fleet Book %: 67.5%</a:t>
                       </a:r>
                     </a:p>
                   </a:txBody>
@@ -4620,11 +4620,11 @@
                       <a:r>
                         <a:rPr sz="800">
                           <a:solidFill>
-                            <a:srgbClr val="059669"/>
+                            <a:srgbClr val="DC2626"/>
                           </a:solidFill>
                           <a:latin typeface="Segoe UI"/>
                         </a:rPr>
-                        <a:t>13.4%</a:t>
+                        <a:t>11.9%</a:t>
                       </a:r>
                     </a:p>
                   </a:txBody>
@@ -4906,7 +4906,7 @@
                           </a:solidFill>
                           <a:latin typeface="Segoe UI"/>
                         </a:rPr>
-                        <a:t>9</a:t>
+                        <a:t>8</a:t>
                       </a:r>
                     </a:p>
                   </a:txBody>

--- a/generated/Tier 1 Broker Scorecards/Lion Insurance Services_Broker_Scorecard.pptx
+++ b/generated/Tier 1 Broker Scorecards/Lion Insurance Services_Broker_Scorecard.pptx
@@ -3357,7 +3357,7 @@
                         <a:rPr sz="800">
                           <a:latin typeface="Segoe UI"/>
                         </a:rPr>
-                        <a:t>$345,901.49 / $819,815.55 / $479,756.25</a:t>
+                        <a:t>$345,901.49 / $820,077.34 / $480,018.04</a:t>
                       </a:r>
                     </a:p>
                   </a:txBody>
@@ -3394,7 +3394,7 @@
                         <a:rPr sz="900">
                           <a:latin typeface="Segoe UI"/>
                         </a:rPr>
-                        <a:t>Tier 1  |  4.60% / 15.00%</a:t>
+                        <a:t>Tier 1  |  4.92% / 15.00%</a:t>
                       </a:r>
                     </a:p>
                   </a:txBody>
@@ -3690,7 +3690,7 @@
                         <a:rPr sz="900">
                           <a:latin typeface="Segoe UI"/>
                         </a:rPr>
-                        <a:t>Fleet Bound Premium: $155,723.48</a:t>
+                        <a:t>Fleet Bound Premium: $142,413.06</a:t>
                       </a:r>
                     </a:p>
                   </a:txBody>
@@ -3727,7 +3727,7 @@
                         <a:rPr sz="900">
                           <a:latin typeface="Segoe UI"/>
                         </a:rPr>
-                        <a:t>Fleet Book %: 32.5%</a:t>
+                        <a:t>Fleet Book %: 29.7%</a:t>
                       </a:r>
                     </a:p>
                   </a:txBody>
@@ -3766,7 +3766,7 @@
                         <a:rPr sz="900">
                           <a:latin typeface="Segoe UI"/>
                         </a:rPr>
-                        <a:t>Non-Fleet Subs: 215  |  Binds: 10</a:t>
+                        <a:t>Non-Fleet Subs: 220  |  Binds: 11</a:t>
                       </a:r>
                     </a:p>
                   </a:txBody>
@@ -3803,7 +3803,7 @@
                         <a:rPr sz="900">
                           <a:latin typeface="Segoe UI"/>
                         </a:rPr>
-                        <a:t>Non-Fleet Bound Premium: $324,032.77</a:t>
+                        <a:t>Non-Fleet Bound Premium: $337,604.98</a:t>
                       </a:r>
                     </a:p>
                   </a:txBody>
@@ -3840,7 +3840,7 @@
                         <a:rPr sz="900">
                           <a:latin typeface="Segoe UI"/>
                         </a:rPr>
-                        <a:t>Non-Fleet Book %: 67.5%</a:t>
+                        <a:t>Non-Fleet Book %: 70.3%</a:t>
                       </a:r>
                     </a:p>
                   </a:txBody>
@@ -4428,7 +4428,7 @@
                           </a:solidFill>
                           <a:latin typeface="Segoe UI"/>
                         </a:rPr>
-                        <a:t>50</a:t>
+                        <a:t>55</a:t>
                       </a:r>
                     </a:p>
                   </a:txBody>
@@ -4620,11 +4620,11 @@
                       <a:r>
                         <a:rPr sz="800">
                           <a:solidFill>
-                            <a:srgbClr val="DC2626"/>
+                            <a:srgbClr val="059669"/>
                           </a:solidFill>
                           <a:latin typeface="Segoe UI"/>
                         </a:rPr>
-                        <a:t>11.9%</a:t>
+                        <a:t>13.4%</a:t>
                       </a:r>
                     </a:p>
                   </a:txBody>
@@ -4707,7 +4707,7 @@
                           </a:solidFill>
                           <a:latin typeface="Segoe UI"/>
                         </a:rPr>
-                        <a:t>6.0%</a:t>
+                        <a:t>7.3%</a:t>
                       </a:r>
                     </a:p>
                   </a:txBody>
@@ -4906,7 +4906,7 @@
                           </a:solidFill>
                           <a:latin typeface="Segoe UI"/>
                         </a:rPr>
-                        <a:t>8</a:t>
+                        <a:t>9</a:t>
                       </a:r>
                     </a:p>
                   </a:txBody>
@@ -4983,7 +4983,7 @@
                           </a:solidFill>
                           <a:latin typeface="Segoe UI"/>
                         </a:rPr>
-                        <a:t>3</a:t>
+                        <a:t>4</a:t>
                       </a:r>
                     </a:p>
                   </a:txBody>
@@ -5262,7 +5262,7 @@
                           </a:solidFill>
                           <a:latin typeface="Segoe UI"/>
                         </a:rPr>
-                        <a:t>$63.6K</a:t>
+                        <a:t>$63.9K</a:t>
                       </a:r>
                     </a:p>
                   </a:txBody>

--- a/generated/Tier 1 Broker Scorecards/Lion Insurance Services_Broker_Scorecard.pptx
+++ b/generated/Tier 1 Broker Scorecards/Lion Insurance Services_Broker_Scorecard.pptx
@@ -3357,7 +3357,7 @@
                         <a:rPr sz="800">
                           <a:latin typeface="Segoe UI"/>
                         </a:rPr>
-                        <a:t>$345,901.49 / $820,077.34 / $480,018.04</a:t>
+                        <a:t>$345,901.49 / $836,150.25 / $496,090.95</a:t>
                       </a:r>
                     </a:p>
                   </a:txBody>
@@ -3394,7 +3394,7 @@
                         <a:rPr sz="900">
                           <a:latin typeface="Segoe UI"/>
                         </a:rPr>
-                        <a:t>Tier 1  |  4.92% / 15.00%</a:t>
+                        <a:t>Tier 1  |  4.45% / 15.00%</a:t>
                       </a:r>
                     </a:p>
                   </a:txBody>
@@ -3431,7 +3431,7 @@
                         <a:rPr sz="900">
                           <a:latin typeface="Segoe UI"/>
                         </a:rPr>
-                        <a:t>$484,262.09  (99.1% achieved)</a:t>
+                        <a:t>$484,262.09  (102.4% achieved)</a:t>
                       </a:r>
                     </a:p>
                   </a:txBody>
@@ -3690,7 +3690,7 @@
                         <a:rPr sz="900">
                           <a:latin typeface="Segoe UI"/>
                         </a:rPr>
-                        <a:t>Fleet Bound Premium: $142,413.06</a:t>
+                        <a:t>Fleet Bound Premium: $157,377.08</a:t>
                       </a:r>
                     </a:p>
                   </a:txBody>
@@ -3727,7 +3727,7 @@
                         <a:rPr sz="900">
                           <a:latin typeface="Segoe UI"/>
                         </a:rPr>
-                        <a:t>Fleet Book %: 29.7%</a:t>
+                        <a:t>Fleet Book %: 31.7%</a:t>
                       </a:r>
                     </a:p>
                   </a:txBody>
@@ -3766,7 +3766,7 @@
                         <a:rPr sz="900">
                           <a:latin typeface="Segoe UI"/>
                         </a:rPr>
-                        <a:t>Non-Fleet Subs: 220  |  Binds: 11</a:t>
+                        <a:t>Non-Fleet Subs: 223  |  Binds: 10</a:t>
                       </a:r>
                     </a:p>
                   </a:txBody>
@@ -3803,7 +3803,7 @@
                         <a:rPr sz="900">
                           <a:latin typeface="Segoe UI"/>
                         </a:rPr>
-                        <a:t>Non-Fleet Bound Premium: $337,604.98</a:t>
+                        <a:t>Non-Fleet Bound Premium: $338,713.87</a:t>
                       </a:r>
                     </a:p>
                   </a:txBody>
@@ -3840,7 +3840,7 @@
                         <a:rPr sz="900">
                           <a:latin typeface="Segoe UI"/>
                         </a:rPr>
-                        <a:t>Non-Fleet Book %: 70.3%</a:t>
+                        <a:t>Non-Fleet Book %: 68.3%</a:t>
                       </a:r>
                     </a:p>
                   </a:txBody>
@@ -4428,7 +4428,7 @@
                           </a:solidFill>
                           <a:latin typeface="Segoe UI"/>
                         </a:rPr>
-                        <a:t>55</a:t>
+                        <a:t>58</a:t>
                       </a:r>
                     </a:p>
                   </a:txBody>
@@ -4620,11 +4620,11 @@
                       <a:r>
                         <a:rPr sz="800">
                           <a:solidFill>
-                            <a:srgbClr val="059669"/>
+                            <a:srgbClr val="DC2626"/>
                           </a:solidFill>
                           <a:latin typeface="Segoe UI"/>
                         </a:rPr>
-                        <a:t>13.4%</a:t>
+                        <a:t>11.9%</a:t>
                       </a:r>
                     </a:p>
                   </a:txBody>
@@ -4707,7 +4707,7 @@
                           </a:solidFill>
                           <a:latin typeface="Segoe UI"/>
                         </a:rPr>
-                        <a:t>7.3%</a:t>
+                        <a:t>8.6%</a:t>
                       </a:r>
                     </a:p>
                   </a:txBody>
@@ -4906,7 +4906,7 @@
                           </a:solidFill>
                           <a:latin typeface="Segoe UI"/>
                         </a:rPr>
-                        <a:t>9</a:t>
+                        <a:t>8</a:t>
                       </a:r>
                     </a:p>
                   </a:txBody>
@@ -4983,7 +4983,7 @@
                           </a:solidFill>
                           <a:latin typeface="Segoe UI"/>
                         </a:rPr>
-                        <a:t>4</a:t>
+                        <a:t>5</a:t>
                       </a:r>
                     </a:p>
                   </a:txBody>
@@ -5262,7 +5262,7 @@
                           </a:solidFill>
                           <a:latin typeface="Segoe UI"/>
                         </a:rPr>
-                        <a:t>$63.9K</a:t>
+                        <a:t>$79.9K</a:t>
                       </a:r>
                     </a:p>
                   </a:txBody>

--- a/generated/Tier 1 Broker Scorecards/Lion Insurance Services_Broker_Scorecard.pptx
+++ b/generated/Tier 1 Broker Scorecards/Lion Insurance Services_Broker_Scorecard.pptx
@@ -3357,7 +3357,7 @@
                         <a:rPr sz="800">
                           <a:latin typeface="Segoe UI"/>
                         </a:rPr>
-                        <a:t>$345,901.49 / $836,150.25 / $496,090.95</a:t>
+                        <a:t>$345,901.49 / $852,232.36 / $512,173.06</a:t>
                       </a:r>
                     </a:p>
                   </a:txBody>
@@ -3394,7 +3394,7 @@
                         <a:rPr sz="900">
                           <a:latin typeface="Segoe UI"/>
                         </a:rPr>
-                        <a:t>Tier 1  |  4.45% / 15.00%</a:t>
+                        <a:t>Tier 1  |  5.24% / 15.00%</a:t>
                       </a:r>
                     </a:p>
                   </a:txBody>
@@ -3431,7 +3431,7 @@
                         <a:rPr sz="900">
                           <a:latin typeface="Segoe UI"/>
                         </a:rPr>
-                        <a:t>$484,262.09  (102.4% achieved)</a:t>
+                        <a:t>$484,262.09  (105.8% achieved)</a:t>
                       </a:r>
                     </a:p>
                   </a:txBody>
@@ -3690,7 +3690,7 @@
                         <a:rPr sz="900">
                           <a:latin typeface="Segoe UI"/>
                         </a:rPr>
-                        <a:t>Fleet Bound Premium: $157,377.08</a:t>
+                        <a:t>Fleet Bound Premium: $127,145.88</a:t>
                       </a:r>
                     </a:p>
                   </a:txBody>
@@ -3727,7 +3727,7 @@
                         <a:rPr sz="900">
                           <a:latin typeface="Segoe UI"/>
                         </a:rPr>
-                        <a:t>Fleet Book %: 31.7%</a:t>
+                        <a:t>Fleet Book %: 24.8%</a:t>
                       </a:r>
                     </a:p>
                   </a:txBody>
@@ -3766,7 +3766,7 @@
                         <a:rPr sz="900">
                           <a:latin typeface="Segoe UI"/>
                         </a:rPr>
-                        <a:t>Non-Fleet Subs: 223  |  Binds: 10</a:t>
+                        <a:t>Non-Fleet Subs: 224  |  Binds: 12</a:t>
                       </a:r>
                     </a:p>
                   </a:txBody>
@@ -3803,7 +3803,7 @@
                         <a:rPr sz="900">
                           <a:latin typeface="Segoe UI"/>
                         </a:rPr>
-                        <a:t>Non-Fleet Bound Premium: $338,713.87</a:t>
+                        <a:t>Non-Fleet Bound Premium: $385,027.18</a:t>
                       </a:r>
                     </a:p>
                   </a:txBody>
@@ -3840,7 +3840,7 @@
                         <a:rPr sz="900">
                           <a:latin typeface="Segoe UI"/>
                         </a:rPr>
-                        <a:t>Non-Fleet Book %: 68.3%</a:t>
+                        <a:t>Non-Fleet Book %: 75.2%</a:t>
                       </a:r>
                     </a:p>
                   </a:txBody>
@@ -4428,7 +4428,7 @@
                           </a:solidFill>
                           <a:latin typeface="Segoe UI"/>
                         </a:rPr>
-                        <a:t>58</a:t>
+                        <a:t>59</a:t>
                       </a:r>
                     </a:p>
                   </a:txBody>
@@ -4624,7 +4624,7 @@
                           </a:solidFill>
                           <a:latin typeface="Segoe UI"/>
                         </a:rPr>
-                        <a:t>11.9%</a:t>
+                        <a:t>10.4%</a:t>
                       </a:r>
                     </a:p>
                   </a:txBody>
@@ -4707,7 +4707,7 @@
                           </a:solidFill>
                           <a:latin typeface="Segoe UI"/>
                         </a:rPr>
-                        <a:t>8.6%</a:t>
+                        <a:t>10.2%</a:t>
                       </a:r>
                     </a:p>
                   </a:txBody>
@@ -4906,7 +4906,7 @@
                           </a:solidFill>
                           <a:latin typeface="Segoe UI"/>
                         </a:rPr>
-                        <a:t>8</a:t>
+                        <a:t>7</a:t>
                       </a:r>
                     </a:p>
                   </a:txBody>
@@ -4983,7 +4983,7 @@
                           </a:solidFill>
                           <a:latin typeface="Segoe UI"/>
                         </a:rPr>
-                        <a:t>5</a:t>
+                        <a:t>6</a:t>
                       </a:r>
                     </a:p>
                   </a:txBody>
@@ -5262,7 +5262,7 @@
                           </a:solidFill>
                           <a:latin typeface="Segoe UI"/>
                         </a:rPr>
-                        <a:t>$79.9K</a:t>
+                        <a:t>$96.0K</a:t>
                       </a:r>
                     </a:p>
                   </a:txBody>

--- a/generated/Tier 1 Broker Scorecards/Lion Insurance Services_Broker_Scorecard.pptx
+++ b/generated/Tier 1 Broker Scorecards/Lion Insurance Services_Broker_Scorecard.pptx
@@ -3394,7 +3394,7 @@
                         <a:rPr sz="900">
                           <a:latin typeface="Segoe UI"/>
                         </a:rPr>
-                        <a:t>Tier 1  |  5.24% / 15.00%</a:t>
+                        <a:t>Tier 1  |  5.56% / 15.00%</a:t>
                       </a:r>
                     </a:p>
                   </a:txBody>
@@ -3690,7 +3690,7 @@
                         <a:rPr sz="900">
                           <a:latin typeface="Segoe UI"/>
                         </a:rPr>
-                        <a:t>Fleet Bound Premium: $127,145.88</a:t>
+                        <a:t>Fleet Bound Premium: $119,124.34</a:t>
                       </a:r>
                     </a:p>
                   </a:txBody>
@@ -3727,7 +3727,7 @@
                         <a:rPr sz="900">
                           <a:latin typeface="Segoe UI"/>
                         </a:rPr>
-                        <a:t>Fleet Book %: 24.8%</a:t>
+                        <a:t>Fleet Book %: 23.3%</a:t>
                       </a:r>
                     </a:p>
                   </a:txBody>
@@ -3766,7 +3766,7 @@
                         <a:rPr sz="900">
                           <a:latin typeface="Segoe UI"/>
                         </a:rPr>
-                        <a:t>Non-Fleet Subs: 224  |  Binds: 12</a:t>
+                        <a:t>Non-Fleet Subs: 228  |  Binds: 13</a:t>
                       </a:r>
                     </a:p>
                   </a:txBody>
@@ -3803,7 +3803,7 @@
                         <a:rPr sz="900">
                           <a:latin typeface="Segoe UI"/>
                         </a:rPr>
-                        <a:t>Non-Fleet Bound Premium: $385,027.18</a:t>
+                        <a:t>Non-Fleet Bound Premium: $393,048.72</a:t>
                       </a:r>
                     </a:p>
                   </a:txBody>
@@ -3840,7 +3840,7 @@
                         <a:rPr sz="900">
                           <a:latin typeface="Segoe UI"/>
                         </a:rPr>
-                        <a:t>Non-Fleet Book %: 75.2%</a:t>
+                        <a:t>Non-Fleet Book %: 76.7%</a:t>
                       </a:r>
                     </a:p>
                   </a:txBody>
@@ -4424,11 +4424,11 @@
                       <a:r>
                         <a:rPr sz="800">
                           <a:solidFill>
-                            <a:srgbClr val="DC2626"/>
+                            <a:srgbClr val="059669"/>
                           </a:solidFill>
                           <a:latin typeface="Segoe UI"/>
                         </a:rPr>
-                        <a:t>59</a:t>
+                        <a:t>63</a:t>
                       </a:r>
                     </a:p>
                   </a:txBody>
@@ -4624,7 +4624,7 @@
                           </a:solidFill>
                           <a:latin typeface="Segoe UI"/>
                         </a:rPr>
-                        <a:t>10.4%</a:t>
+                        <a:t>11.9%</a:t>
                       </a:r>
                     </a:p>
                   </a:txBody>
@@ -4707,7 +4707,7 @@
                           </a:solidFill>
                           <a:latin typeface="Segoe UI"/>
                         </a:rPr>
-                        <a:t>10.2%</a:t>
+                        <a:t>9.5%</a:t>
                       </a:r>
                     </a:p>
                   </a:txBody>
@@ -4906,7 +4906,7 @@
                           </a:solidFill>
                           <a:latin typeface="Segoe UI"/>
                         </a:rPr>
-                        <a:t>7</a:t>
+                        <a:t>8</a:t>
                       </a:r>
                     </a:p>
                   </a:txBody>

--- a/generated/Tier 1 Broker Scorecards/Lion Insurance Services_Broker_Scorecard.pptx
+++ b/generated/Tier 1 Broker Scorecards/Lion Insurance Services_Broker_Scorecard.pptx
@@ -3394,7 +3394,7 @@
                         <a:rPr sz="900">
                           <a:latin typeface="Segoe UI"/>
                         </a:rPr>
-                        <a:t>Tier 1  |  5.56% / 15.00%</a:t>
+                        <a:t>Tier 1  |  5.16% / 15.00%</a:t>
                       </a:r>
                     </a:p>
                   </a:txBody>
@@ -3690,7 +3690,7 @@
                         <a:rPr sz="900">
                           <a:latin typeface="Segoe UI"/>
                         </a:rPr>
-                        <a:t>Fleet Bound Premium: $119,124.34</a:t>
+                        <a:t>Fleet Bound Premium: $127,145.88</a:t>
                       </a:r>
                     </a:p>
                   </a:txBody>
@@ -3727,7 +3727,7 @@
                         <a:rPr sz="900">
                           <a:latin typeface="Segoe UI"/>
                         </a:rPr>
-                        <a:t>Fleet Book %: 23.3%</a:t>
+                        <a:t>Fleet Book %: 24.8%</a:t>
                       </a:r>
                     </a:p>
                   </a:txBody>
@@ -3766,7 +3766,7 @@
                         <a:rPr sz="900">
                           <a:latin typeface="Segoe UI"/>
                         </a:rPr>
-                        <a:t>Non-Fleet Subs: 228  |  Binds: 13</a:t>
+                        <a:t>Non-Fleet Subs: 228  |  Binds: 12</a:t>
                       </a:r>
                     </a:p>
                   </a:txBody>
@@ -3803,7 +3803,7 @@
                         <a:rPr sz="900">
                           <a:latin typeface="Segoe UI"/>
                         </a:rPr>
-                        <a:t>Non-Fleet Bound Premium: $393,048.72</a:t>
+                        <a:t>Non-Fleet Bound Premium: $385,027.18</a:t>
                       </a:r>
                     </a:p>
                   </a:txBody>
@@ -3840,7 +3840,7 @@
                         <a:rPr sz="900">
                           <a:latin typeface="Segoe UI"/>
                         </a:rPr>
-                        <a:t>Non-Fleet Book %: 76.7%</a:t>
+                        <a:t>Non-Fleet Book %: 75.2%</a:t>
                       </a:r>
                     </a:p>
                   </a:txBody>

--- a/generated/Tier 1 Broker Scorecards/Lion Insurance Services_Broker_Scorecard.pptx
+++ b/generated/Tier 1 Broker Scorecards/Lion Insurance Services_Broker_Scorecard.pptx
@@ -3357,7 +3357,7 @@
                         <a:rPr sz="800">
                           <a:latin typeface="Segoe UI"/>
                         </a:rPr>
-                        <a:t>$345,901.49 / $852,232.36 / $512,173.06</a:t>
+                        <a:t>$345,901.49 / $837,905.80 / $512,173.06</a:t>
                       </a:r>
                     </a:p>
                   </a:txBody>
@@ -3690,7 +3690,7 @@
                         <a:rPr sz="900">
                           <a:latin typeface="Segoe UI"/>
                         </a:rPr>
-                        <a:t>Fleet Bound Premium: $127,145.88</a:t>
+                        <a:t>Fleet Bound Premium: $125,414.08</a:t>
                       </a:r>
                     </a:p>
                   </a:txBody>
@@ -3727,7 +3727,7 @@
                         <a:rPr sz="900">
                           <a:latin typeface="Segoe UI"/>
                         </a:rPr>
-                        <a:t>Fleet Book %: 24.8%</a:t>
+                        <a:t>Fleet Book %: 24.5%</a:t>
                       </a:r>
                     </a:p>
                   </a:txBody>
@@ -3803,7 +3803,7 @@
                         <a:rPr sz="900">
                           <a:latin typeface="Segoe UI"/>
                         </a:rPr>
-                        <a:t>Non-Fleet Bound Premium: $385,027.18</a:t>
+                        <a:t>Non-Fleet Bound Premium: $386,758.98</a:t>
                       </a:r>
                     </a:p>
                   </a:txBody>
@@ -3840,7 +3840,7 @@
                         <a:rPr sz="900">
                           <a:latin typeface="Segoe UI"/>
                         </a:rPr>
-                        <a:t>Non-Fleet Book %: 75.2%</a:t>
+                        <a:t>Non-Fleet Book %: 75.5%</a:t>
                       </a:r>
                     </a:p>
                   </a:txBody>
@@ -4624,7 +4624,7 @@
                           </a:solidFill>
                           <a:latin typeface="Segoe UI"/>
                         </a:rPr>
-                        <a:t>11.9%</a:t>
+                        <a:t>10.4%</a:t>
                       </a:r>
                     </a:p>
                   </a:txBody>
@@ -4906,7 +4906,7 @@
                           </a:solidFill>
                           <a:latin typeface="Segoe UI"/>
                         </a:rPr>
-                        <a:t>8</a:t>
+                        <a:t>7</a:t>
                       </a:r>
                     </a:p>
                   </a:txBody>
